--- a/ccg-presentation/CCG_Readout.pptx
+++ b/ccg-presentation/CCG_Readout.pptx
@@ -5,20 +5,21 @@
     <p:sldMasterId id="2147483648" r:id="rId1"/>
   </p:sldMasterIdLst>
   <p:notesMasterIdLst>
-    <p:notesMasterId r:id="rId13"/>
+    <p:notesMasterId r:id="rId14"/>
   </p:notesMasterIdLst>
   <p:sldIdLst>
     <p:sldId id="256" r:id="rId2"/>
-    <p:sldId id="262" r:id="rId3"/>
-    <p:sldId id="260" r:id="rId4"/>
-    <p:sldId id="261" r:id="rId5"/>
-    <p:sldId id="263" r:id="rId6"/>
-    <p:sldId id="264" r:id="rId7"/>
-    <p:sldId id="265" r:id="rId8"/>
-    <p:sldId id="266" r:id="rId9"/>
-    <p:sldId id="269" r:id="rId10"/>
-    <p:sldId id="267" r:id="rId11"/>
-    <p:sldId id="268" r:id="rId12"/>
+    <p:sldId id="270" r:id="rId3"/>
+    <p:sldId id="262" r:id="rId4"/>
+    <p:sldId id="260" r:id="rId5"/>
+    <p:sldId id="261" r:id="rId6"/>
+    <p:sldId id="263" r:id="rId7"/>
+    <p:sldId id="264" r:id="rId8"/>
+    <p:sldId id="265" r:id="rId9"/>
+    <p:sldId id="266" r:id="rId10"/>
+    <p:sldId id="269" r:id="rId11"/>
+    <p:sldId id="267" r:id="rId12"/>
+    <p:sldId id="268" r:id="rId13"/>
   </p:sldIdLst>
   <p:sldSz cx="12192000" cy="6858000"/>
   <p:notesSz cx="6858000" cy="9144000"/>
@@ -123,6 +124,7 @@
         <p14:section name="Default Section" id="{AF26F20B-C463-0349-B3F4-28E85F07C8D9}">
           <p14:sldIdLst>
             <p14:sldId id="256"/>
+            <p14:sldId id="270"/>
           </p14:sldIdLst>
         </p14:section>
         <p14:section name="SINGLE AGENT SOLUTION" id="{4D64E129-12EB-1547-992A-4FFB90BB2CA9}">
@@ -581,7 +583,7 @@
           <a:p>
             <a:fld id="{D4053980-04C6-514C-B838-6C1CBA4B85FD}" type="slidenum">
               <a:rPr lang="en-US" smtClean="0"/>
-              <a:t>8</a:t>
+              <a:t>9</a:t>
             </a:fld>
             <a:endParaRPr lang="en-US"/>
           </a:p>
@@ -3647,6 +3649,101 @@
           <p:cNvPr id="2" name="Title 1">
             <a:extLst>
               <a:ext uri="{FF2B5EF4-FFF2-40B4-BE49-F238E27FC236}">
+                <a16:creationId xmlns:a16="http://schemas.microsoft.com/office/drawing/2014/main" id="{EA31846E-32CF-6F92-4CA8-A60E6542FC0E}"/>
+              </a:ext>
+            </a:extLst>
+          </p:cNvPr>
+          <p:cNvSpPr>
+            <a:spLocks noGrp="1"/>
+          </p:cNvSpPr>
+          <p:nvPr>
+            <p:ph type="title"/>
+          </p:nvPr>
+        </p:nvSpPr>
+        <p:spPr>
+          <a:xfrm>
+            <a:off x="609600" y="101018"/>
+            <a:ext cx="10972800" cy="385119"/>
+          </a:xfrm>
+        </p:spPr>
+        <p:txBody>
+          <a:bodyPr>
+            <a:normAutofit fontScale="90000"/>
+          </a:bodyPr>
+          <a:lstStyle/>
+          <a:p>
+            <a:r>
+              <a:rPr lang="en-US" dirty="0"/>
+              <a:t>Agent Specialization Diagram</a:t>
+            </a:r>
+          </a:p>
+        </p:txBody>
+      </p:sp>
+      <p:pic>
+        <p:nvPicPr>
+          <p:cNvPr id="4" name="Picture 3">
+            <a:extLst>
+              <a:ext uri="{FF2B5EF4-FFF2-40B4-BE49-F238E27FC236}">
+                <a16:creationId xmlns:a16="http://schemas.microsoft.com/office/drawing/2014/main" id="{CC2F3298-17DB-FA48-C8A3-C5FDB9B56554}"/>
+              </a:ext>
+            </a:extLst>
+          </p:cNvPr>
+          <p:cNvPicPr>
+            <a:picLocks noChangeAspect="1"/>
+          </p:cNvPicPr>
+          <p:nvPr/>
+        </p:nvPicPr>
+        <p:blipFill>
+          <a:blip r:embed="rId2"/>
+          <a:stretch>
+            <a:fillRect/>
+          </a:stretch>
+        </p:blipFill>
+        <p:spPr>
+          <a:xfrm>
+            <a:off x="42742" y="2050862"/>
+            <a:ext cx="12106516" cy="2756276"/>
+          </a:xfrm>
+          <a:prstGeom prst="rect">
+            <a:avLst/>
+          </a:prstGeom>
+        </p:spPr>
+      </p:pic>
+    </p:spTree>
+    <p:extLst>
+      <p:ext uri="{BB962C8B-B14F-4D97-AF65-F5344CB8AC3E}">
+        <p14:creationId xmlns:p14="http://schemas.microsoft.com/office/powerpoint/2010/main" val="2522311710"/>
+      </p:ext>
+    </p:extLst>
+  </p:cSld>
+  <p:clrMapOvr>
+    <a:masterClrMapping/>
+  </p:clrMapOvr>
+</p:sld>
+</file>
+
+<file path=ppt/slides/slide11.xml><?xml version="1.0" encoding="utf-8"?>
+<p:sld xmlns:a="http://schemas.openxmlformats.org/drawingml/2006/main" xmlns:r="http://schemas.openxmlformats.org/officeDocument/2006/relationships" xmlns:p="http://schemas.openxmlformats.org/presentationml/2006/main">
+  <p:cSld>
+    <p:spTree>
+      <p:nvGrpSpPr>
+        <p:cNvPr id="1" name=""/>
+        <p:cNvGrpSpPr/>
+        <p:nvPr/>
+      </p:nvGrpSpPr>
+      <p:grpSpPr>
+        <a:xfrm>
+          <a:off x="0" y="0"/>
+          <a:ext cx="0" cy="0"/>
+          <a:chOff x="0" y="0"/>
+          <a:chExt cx="0" cy="0"/>
+        </a:xfrm>
+      </p:grpSpPr>
+      <p:sp>
+        <p:nvSpPr>
+          <p:cNvPr id="2" name="Title 1">
+            <a:extLst>
+              <a:ext uri="{FF2B5EF4-FFF2-40B4-BE49-F238E27FC236}">
                 <a16:creationId xmlns:a16="http://schemas.microsoft.com/office/drawing/2014/main" id="{4D0B4AC9-95E2-55A1-57A2-BB222AAB79ED}"/>
               </a:ext>
             </a:extLst>
@@ -3720,7 +3817,7 @@
 </p:sld>
 </file>
 
-<file path=ppt/slides/slide11.xml><?xml version="1.0" encoding="utf-8"?>
+<file path=ppt/slides/slide12.xml><?xml version="1.0" encoding="utf-8"?>
 <p:sld xmlns:a="http://schemas.openxmlformats.org/drawingml/2006/main" xmlns:r="http://schemas.openxmlformats.org/officeDocument/2006/relationships" xmlns:p="http://schemas.openxmlformats.org/presentationml/2006/main">
   <p:cSld>
     <p:spTree>
@@ -3837,6 +3934,421 @@
           <p:cNvPr id="2" name="Title 1">
             <a:extLst>
               <a:ext uri="{FF2B5EF4-FFF2-40B4-BE49-F238E27FC236}">
+                <a16:creationId xmlns:a16="http://schemas.microsoft.com/office/drawing/2014/main" id="{59762BD4-A24D-7C5A-14F3-CAEDEF326C6B}"/>
+              </a:ext>
+            </a:extLst>
+          </p:cNvPr>
+          <p:cNvSpPr>
+            <a:spLocks noGrp="1"/>
+          </p:cNvSpPr>
+          <p:nvPr>
+            <p:ph type="title"/>
+          </p:nvPr>
+        </p:nvSpPr>
+        <p:spPr>
+          <a:xfrm>
+            <a:off x="609600" y="274638"/>
+            <a:ext cx="10972800" cy="372634"/>
+          </a:xfrm>
+        </p:spPr>
+        <p:txBody>
+          <a:bodyPr>
+            <a:normAutofit fontScale="90000"/>
+          </a:bodyPr>
+          <a:lstStyle/>
+          <a:p>
+            <a:r>
+              <a:rPr lang="en-CA" dirty="0">
+                <a:latin typeface="Segoe UI" panose="020B0502040204020203" pitchFamily="34" charset="0"/>
+                <a:cs typeface="Segoe UI" panose="020B0502040204020203" pitchFamily="34" charset="0"/>
+              </a:rPr>
+              <a:t>Contoso Consulting Group — Multi-Agent Timesheet Assistant</a:t>
+            </a:r>
+            <a:endParaRPr lang="en-US" dirty="0"/>
+          </a:p>
+        </p:txBody>
+      </p:sp>
+      <p:sp>
+        <p:nvSpPr>
+          <p:cNvPr id="3" name="Content Placeholder 2">
+            <a:extLst>
+              <a:ext uri="{FF2B5EF4-FFF2-40B4-BE49-F238E27FC236}">
+                <a16:creationId xmlns:a16="http://schemas.microsoft.com/office/drawing/2014/main" id="{55ECBA5B-299F-0691-A77B-44DEFCE5AD94}"/>
+              </a:ext>
+            </a:extLst>
+          </p:cNvPr>
+          <p:cNvSpPr>
+            <a:spLocks noGrp="1"/>
+          </p:cNvSpPr>
+          <p:nvPr>
+            <p:ph idx="1"/>
+          </p:nvPr>
+        </p:nvSpPr>
+        <p:spPr/>
+        <p:txBody>
+          <a:bodyPr>
+            <a:normAutofit fontScale="25000" lnSpcReduction="20000"/>
+          </a:bodyPr>
+          <a:lstStyle/>
+          <a:p>
+            <a:pPr marL="0" indent="0">
+              <a:buNone/>
+            </a:pPr>
+            <a:br>
+              <a:rPr lang="en-CA" sz="5600" dirty="0">
+                <a:latin typeface="Segoe UI" panose="020B0502040204020203" pitchFamily="34" charset="0"/>
+                <a:cs typeface="Segoe UI" panose="020B0502040204020203" pitchFamily="34" charset="0"/>
+              </a:rPr>
+            </a:br>
+            <a:endParaRPr lang="en-CA" sz="5600" dirty="0">
+              <a:latin typeface="Segoe UI" panose="020B0502040204020203" pitchFamily="34" charset="0"/>
+              <a:cs typeface="Segoe UI" panose="020B0502040204020203" pitchFamily="34" charset="0"/>
+            </a:endParaRPr>
+          </a:p>
+          <a:p>
+            <a:pPr marL="0" indent="0">
+              <a:buNone/>
+            </a:pPr>
+            <a:r>
+              <a:rPr lang="en-CA" sz="5600" b="1" dirty="0">
+                <a:latin typeface="Segoe UI" panose="020B0502040204020203" pitchFamily="34" charset="0"/>
+                <a:cs typeface="Segoe UI" panose="020B0502040204020203" pitchFamily="34" charset="0"/>
+              </a:rPr>
+              <a:t>### 🎯 The Problem</a:t>
+            </a:r>
+            <a:endParaRPr lang="en-CA" sz="5600" dirty="0">
+              <a:latin typeface="Segoe UI" panose="020B0502040204020203" pitchFamily="34" charset="0"/>
+              <a:cs typeface="Segoe UI" panose="020B0502040204020203" pitchFamily="34" charset="0"/>
+            </a:endParaRPr>
+          </a:p>
+          <a:p>
+            <a:pPr marL="0" indent="0">
+              <a:buNone/>
+            </a:pPr>
+            <a:br>
+              <a:rPr lang="en-CA" sz="5600" dirty="0">
+                <a:latin typeface="Segoe UI" panose="020B0502040204020203" pitchFamily="34" charset="0"/>
+                <a:cs typeface="Segoe UI" panose="020B0502040204020203" pitchFamily="34" charset="0"/>
+              </a:rPr>
+            </a:br>
+            <a:endParaRPr lang="en-CA" sz="5600" dirty="0">
+              <a:latin typeface="Segoe UI" panose="020B0502040204020203" pitchFamily="34" charset="0"/>
+              <a:cs typeface="Segoe UI" panose="020B0502040204020203" pitchFamily="34" charset="0"/>
+            </a:endParaRPr>
+          </a:p>
+          <a:p>
+            <a:pPr marL="0" indent="0">
+              <a:buNone/>
+            </a:pPr>
+            <a:r>
+              <a:rPr lang="en-CA" sz="5600" b="1" dirty="0">
+                <a:latin typeface="Segoe UI" panose="020B0502040204020203" pitchFamily="34" charset="0"/>
+                <a:cs typeface="Segoe UI" panose="020B0502040204020203" pitchFamily="34" charset="0"/>
+              </a:rPr>
+              <a:t>**Lost Revenue**</a:t>
+            </a:r>
+            <a:r>
+              <a:rPr lang="en-CA" sz="5600" dirty="0">
+                <a:latin typeface="Segoe UI" panose="020B0502040204020203" pitchFamily="34" charset="0"/>
+                <a:cs typeface="Segoe UI" panose="020B0502040204020203" pitchFamily="34" charset="0"/>
+              </a:rPr>
+              <a:t>:</a:t>
+            </a:r>
+          </a:p>
+          <a:p>
+            <a:pPr marL="0" indent="0">
+              <a:buNone/>
+            </a:pPr>
+            <a:r>
+              <a:rPr lang="en-CA" sz="5600" dirty="0">
+                <a:latin typeface="Segoe UI" panose="020B0502040204020203" pitchFamily="34" charset="0"/>
+                <a:cs typeface="Segoe UI" panose="020B0502040204020203" pitchFamily="34" charset="0"/>
+              </a:rPr>
+              <a:t>- 💸 Consultants lose </a:t>
+            </a:r>
+            <a:r>
+              <a:rPr lang="en-CA" sz="5600" b="1" dirty="0">
+                <a:latin typeface="Segoe UI" panose="020B0502040204020203" pitchFamily="34" charset="0"/>
+                <a:cs typeface="Segoe UI" panose="020B0502040204020203" pitchFamily="34" charset="0"/>
+              </a:rPr>
+              <a:t>**10-15% of billable time**</a:t>
+            </a:r>
+            <a:r>
+              <a:rPr lang="en-CA" sz="5600" dirty="0">
+                <a:latin typeface="Segoe UI" panose="020B0502040204020203" pitchFamily="34" charset="0"/>
+                <a:cs typeface="Segoe UI" panose="020B0502040204020203" pitchFamily="34" charset="0"/>
+              </a:rPr>
+              <a:t> annually</a:t>
+            </a:r>
+          </a:p>
+          <a:p>
+            <a:pPr marL="0" indent="0">
+              <a:buNone/>
+            </a:pPr>
+            <a:r>
+              <a:rPr lang="en-CA" sz="5600" dirty="0">
+                <a:latin typeface="Segoe UI" panose="020B0502040204020203" pitchFamily="34" charset="0"/>
+                <a:cs typeface="Segoe UI" panose="020B0502040204020203" pitchFamily="34" charset="0"/>
+              </a:rPr>
+              <a:t>- ✈️ Travel time </a:t>
+            </a:r>
+            <a:r>
+              <a:rPr lang="en-CA" sz="5600" b="1" dirty="0">
+                <a:latin typeface="Segoe UI" panose="020B0502040204020203" pitchFamily="34" charset="0"/>
+                <a:cs typeface="Segoe UI" panose="020B0502040204020203" pitchFamily="34" charset="0"/>
+              </a:rPr>
+              <a:t>**most commonly missed**</a:t>
+            </a:r>
+            <a:r>
+              <a:rPr lang="en-CA" sz="5600" dirty="0">
+                <a:latin typeface="Segoe UI" panose="020B0502040204020203" pitchFamily="34" charset="0"/>
+                <a:cs typeface="Segoe UI" panose="020B0502040204020203" pitchFamily="34" charset="0"/>
+              </a:rPr>
+              <a:t> (flights, drives, working meals)</a:t>
+            </a:r>
+          </a:p>
+          <a:p>
+            <a:pPr marL="0" indent="0">
+              <a:buNone/>
+            </a:pPr>
+            <a:r>
+              <a:rPr lang="en-CA" sz="5600" dirty="0">
+                <a:latin typeface="Segoe UI" panose="020B0502040204020203" pitchFamily="34" charset="0"/>
+                <a:cs typeface="Segoe UI" panose="020B0502040204020203" pitchFamily="34" charset="0"/>
+              </a:rPr>
+              <a:t>- 📅 Client meetings </a:t>
+            </a:r>
+            <a:r>
+              <a:rPr lang="en-CA" sz="5600" b="1" dirty="0">
+                <a:latin typeface="Segoe UI" panose="020B0502040204020203" pitchFamily="34" charset="0"/>
+                <a:cs typeface="Segoe UI" panose="020B0502040204020203" pitchFamily="34" charset="0"/>
+              </a:rPr>
+              <a:t>**forgotten**</a:t>
+            </a:r>
+            <a:r>
+              <a:rPr lang="en-CA" sz="5600" dirty="0">
+                <a:latin typeface="Segoe UI" panose="020B0502040204020203" pitchFamily="34" charset="0"/>
+                <a:cs typeface="Segoe UI" panose="020B0502040204020203" pitchFamily="34" charset="0"/>
+              </a:rPr>
+              <a:t> in timesheet records</a:t>
+            </a:r>
+          </a:p>
+          <a:p>
+            <a:pPr marL="0" indent="0">
+              <a:buNone/>
+            </a:pPr>
+            <a:r>
+              <a:rPr lang="en-CA" sz="5600" dirty="0">
+                <a:latin typeface="Segoe UI" panose="020B0502040204020203" pitchFamily="34" charset="0"/>
+                <a:cs typeface="Segoe UI" panose="020B0502040204020203" pitchFamily="34" charset="0"/>
+              </a:rPr>
+              <a:t>- 🔄 Manual reconciliation </a:t>
+            </a:r>
+            <a:r>
+              <a:rPr lang="en-CA" sz="5600" b="1" dirty="0">
+                <a:latin typeface="Segoe UI" panose="020B0502040204020203" pitchFamily="34" charset="0"/>
+                <a:cs typeface="Segoe UI" panose="020B0502040204020203" pitchFamily="34" charset="0"/>
+              </a:rPr>
+              <a:t>**wastes 15-20 minutes/week**</a:t>
+            </a:r>
+            <a:endParaRPr lang="en-CA" sz="5600" dirty="0">
+              <a:latin typeface="Segoe UI" panose="020B0502040204020203" pitchFamily="34" charset="0"/>
+              <a:cs typeface="Segoe UI" panose="020B0502040204020203" pitchFamily="34" charset="0"/>
+            </a:endParaRPr>
+          </a:p>
+          <a:p>
+            <a:pPr marL="0" indent="0">
+              <a:buNone/>
+            </a:pPr>
+            <a:br>
+              <a:rPr lang="en-CA" sz="5600" dirty="0">
+                <a:latin typeface="Segoe UI" panose="020B0502040204020203" pitchFamily="34" charset="0"/>
+                <a:cs typeface="Segoe UI" panose="020B0502040204020203" pitchFamily="34" charset="0"/>
+              </a:rPr>
+            </a:br>
+            <a:endParaRPr lang="en-CA" sz="5600" dirty="0">
+              <a:latin typeface="Segoe UI" panose="020B0502040204020203" pitchFamily="34" charset="0"/>
+              <a:cs typeface="Segoe UI" panose="020B0502040204020203" pitchFamily="34" charset="0"/>
+            </a:endParaRPr>
+          </a:p>
+          <a:p>
+            <a:pPr marL="0" indent="0">
+              <a:buNone/>
+            </a:pPr>
+            <a:r>
+              <a:rPr lang="en-CA" sz="5600" b="1" dirty="0">
+                <a:latin typeface="Segoe UI" panose="020B0502040204020203" pitchFamily="34" charset="0"/>
+                <a:cs typeface="Segoe UI" panose="020B0502040204020203" pitchFamily="34" charset="0"/>
+              </a:rPr>
+              <a:t>**Business Impact**</a:t>
+            </a:r>
+            <a:r>
+              <a:rPr lang="en-CA" sz="5600" dirty="0">
+                <a:latin typeface="Segoe UI" panose="020B0502040204020203" pitchFamily="34" charset="0"/>
+                <a:cs typeface="Segoe UI" panose="020B0502040204020203" pitchFamily="34" charset="0"/>
+              </a:rPr>
+              <a:t>:</a:t>
+            </a:r>
+          </a:p>
+          <a:p>
+            <a:pPr marL="0" indent="0">
+              <a:buNone/>
+            </a:pPr>
+            <a:r>
+              <a:rPr lang="en-CA" sz="5600" dirty="0">
+                <a:latin typeface="Segoe UI" panose="020B0502040204020203" pitchFamily="34" charset="0"/>
+                <a:cs typeface="Segoe UI" panose="020B0502040204020203" pitchFamily="34" charset="0"/>
+              </a:rPr>
+              <a:t>- 💰 </a:t>
+            </a:r>
+            <a:r>
+              <a:rPr lang="en-CA" sz="5600" b="1" dirty="0">
+                <a:latin typeface="Segoe UI" panose="020B0502040204020203" pitchFamily="34" charset="0"/>
+                <a:cs typeface="Segoe UI" panose="020B0502040204020203" pitchFamily="34" charset="0"/>
+              </a:rPr>
+              <a:t>**$1,000/week**</a:t>
+            </a:r>
+            <a:r>
+              <a:rPr lang="en-CA" sz="5600" dirty="0">
+                <a:latin typeface="Segoe UI" panose="020B0502040204020203" pitchFamily="34" charset="0"/>
+                <a:cs typeface="Segoe UI" panose="020B0502040204020203" pitchFamily="34" charset="0"/>
+              </a:rPr>
+              <a:t> lost revenue per consultant</a:t>
+            </a:r>
+          </a:p>
+          <a:p>
+            <a:pPr marL="0" indent="0">
+              <a:buNone/>
+            </a:pPr>
+            <a:r>
+              <a:rPr lang="en-CA" sz="5600" dirty="0">
+                <a:latin typeface="Segoe UI" panose="020B0502040204020203" pitchFamily="34" charset="0"/>
+                <a:cs typeface="Segoe UI" panose="020B0502040204020203" pitchFamily="34" charset="0"/>
+              </a:rPr>
+              <a:t>- ⏱️ </a:t>
+            </a:r>
+            <a:r>
+              <a:rPr lang="en-CA" sz="5600" b="1" dirty="0">
+                <a:latin typeface="Segoe UI" panose="020B0502040204020203" pitchFamily="34" charset="0"/>
+                <a:cs typeface="Segoe UI" panose="020B0502040204020203" pitchFamily="34" charset="0"/>
+              </a:rPr>
+              <a:t>**15-20 minutes/week**</a:t>
+            </a:r>
+            <a:r>
+              <a:rPr lang="en-CA" sz="5600" dirty="0">
+                <a:latin typeface="Segoe UI" panose="020B0502040204020203" pitchFamily="34" charset="0"/>
+                <a:cs typeface="Segoe UI" panose="020B0502040204020203" pitchFamily="34" charset="0"/>
+              </a:rPr>
+              <a:t> on manual reviews</a:t>
+            </a:r>
+          </a:p>
+          <a:p>
+            <a:pPr marL="0" indent="0">
+              <a:buNone/>
+            </a:pPr>
+            <a:r>
+              <a:rPr lang="en-CA" sz="5600" dirty="0">
+                <a:latin typeface="Segoe UI" panose="020B0502040204020203" pitchFamily="34" charset="0"/>
+                <a:cs typeface="Segoe UI" panose="020B0502040204020203" pitchFamily="34" charset="0"/>
+              </a:rPr>
+              <a:t>- ⚠️ </a:t>
+            </a:r>
+            <a:r>
+              <a:rPr lang="en-CA" sz="5600" b="1" dirty="0">
+                <a:latin typeface="Segoe UI" panose="020B0502040204020203" pitchFamily="34" charset="0"/>
+                <a:cs typeface="Segoe UI" panose="020B0502040204020203" pitchFamily="34" charset="0"/>
+              </a:rPr>
+              <a:t>**Compliance risks**</a:t>
+            </a:r>
+            <a:r>
+              <a:rPr lang="en-CA" sz="5600" dirty="0">
+                <a:latin typeface="Segoe UI" panose="020B0502040204020203" pitchFamily="34" charset="0"/>
+                <a:cs typeface="Segoe UI" panose="020B0502040204020203" pitchFamily="34" charset="0"/>
+              </a:rPr>
+              <a:t> from incomplete records</a:t>
+            </a:r>
+          </a:p>
+          <a:p>
+            <a:pPr marL="0" indent="0">
+              <a:buNone/>
+            </a:pPr>
+            <a:r>
+              <a:rPr lang="en-CA" sz="5600" dirty="0">
+                <a:latin typeface="Segoe UI" panose="020B0502040204020203" pitchFamily="34" charset="0"/>
+                <a:cs typeface="Segoe UI" panose="020B0502040204020203" pitchFamily="34" charset="0"/>
+              </a:rPr>
+              <a:t>- 📉 </a:t>
+            </a:r>
+            <a:r>
+              <a:rPr lang="en-CA" sz="5600" b="1" dirty="0">
+                <a:latin typeface="Segoe UI" panose="020B0502040204020203" pitchFamily="34" charset="0"/>
+                <a:cs typeface="Segoe UI" panose="020B0502040204020203" pitchFamily="34" charset="0"/>
+              </a:rPr>
+              <a:t>**Billing inconsistencies**</a:t>
+            </a:r>
+            <a:r>
+              <a:rPr lang="en-CA" sz="5600" dirty="0">
+                <a:latin typeface="Segoe UI" panose="020B0502040204020203" pitchFamily="34" charset="0"/>
+                <a:cs typeface="Segoe UI" panose="020B0502040204020203" pitchFamily="34" charset="0"/>
+              </a:rPr>
+              <a:t> damage client trust</a:t>
+            </a:r>
+          </a:p>
+          <a:p>
+            <a:pPr marL="0" indent="0">
+              <a:buNone/>
+            </a:pPr>
+            <a:br>
+              <a:rPr lang="en-CA" sz="5600" dirty="0">
+                <a:latin typeface="Segoe UI" panose="020B0502040204020203" pitchFamily="34" charset="0"/>
+                <a:cs typeface="Segoe UI" panose="020B0502040204020203" pitchFamily="34" charset="0"/>
+              </a:rPr>
+            </a:br>
+            <a:endParaRPr lang="en-CA" sz="5600" dirty="0">
+              <a:latin typeface="Segoe UI" panose="020B0502040204020203" pitchFamily="34" charset="0"/>
+              <a:cs typeface="Segoe UI" panose="020B0502040204020203" pitchFamily="34" charset="0"/>
+            </a:endParaRPr>
+          </a:p>
+          <a:p>
+            <a:endParaRPr lang="en-US" dirty="0"/>
+          </a:p>
+        </p:txBody>
+      </p:sp>
+    </p:spTree>
+    <p:extLst>
+      <p:ext uri="{BB962C8B-B14F-4D97-AF65-F5344CB8AC3E}">
+        <p14:creationId xmlns:p14="http://schemas.microsoft.com/office/powerpoint/2010/main" val="182270262"/>
+      </p:ext>
+    </p:extLst>
+  </p:cSld>
+  <p:clrMapOvr>
+    <a:masterClrMapping/>
+  </p:clrMapOvr>
+</p:sld>
+</file>
+
+<file path=ppt/slides/slide3.xml><?xml version="1.0" encoding="utf-8"?>
+<p:sld xmlns:a="http://schemas.openxmlformats.org/drawingml/2006/main" xmlns:r="http://schemas.openxmlformats.org/officeDocument/2006/relationships" xmlns:p="http://schemas.openxmlformats.org/presentationml/2006/main">
+  <p:cSld>
+    <p:spTree>
+      <p:nvGrpSpPr>
+        <p:cNvPr id="1" name=""/>
+        <p:cNvGrpSpPr/>
+        <p:nvPr/>
+      </p:nvGrpSpPr>
+      <p:grpSpPr>
+        <a:xfrm>
+          <a:off x="0" y="0"/>
+          <a:ext cx="0" cy="0"/>
+          <a:chOff x="0" y="0"/>
+          <a:chExt cx="0" cy="0"/>
+        </a:xfrm>
+      </p:grpSpPr>
+      <p:sp>
+        <p:nvSpPr>
+          <p:cNvPr id="2" name="Title 1">
+            <a:extLst>
+              <a:ext uri="{FF2B5EF4-FFF2-40B4-BE49-F238E27FC236}">
                 <a16:creationId xmlns:a16="http://schemas.microsoft.com/office/drawing/2014/main" id="{5EE2E313-8B26-579B-5772-A0A3AB552B7D}"/>
               </a:ext>
             </a:extLst>
@@ -3910,7 +4422,7 @@
 </p:sld>
 </file>
 
-<file path=ppt/slides/slide3.xml><?xml version="1.0" encoding="utf-8"?>
+<file path=ppt/slides/slide4.xml><?xml version="1.0" encoding="utf-8"?>
 <p:sld xmlns:a="http://schemas.openxmlformats.org/drawingml/2006/main" xmlns:r="http://schemas.openxmlformats.org/officeDocument/2006/relationships" xmlns:p="http://schemas.openxmlformats.org/presentationml/2006/main">
   <p:cSld>
     <p:spTree>
@@ -3998,7 +4510,7 @@
 </p:sld>
 </file>
 
-<file path=ppt/slides/slide4.xml><?xml version="1.0" encoding="utf-8"?>
+<file path=ppt/slides/slide5.xml><?xml version="1.0" encoding="utf-8"?>
 <p:sld xmlns:a="http://schemas.openxmlformats.org/drawingml/2006/main" xmlns:r="http://schemas.openxmlformats.org/officeDocument/2006/relationships" xmlns:p="http://schemas.openxmlformats.org/presentationml/2006/main">
   <p:cSld>
     <p:spTree>
@@ -4093,7 +4605,7 @@
 </p:sld>
 </file>
 
-<file path=ppt/slides/slide5.xml><?xml version="1.0" encoding="utf-8"?>
+<file path=ppt/slides/slide6.xml><?xml version="1.0" encoding="utf-8"?>
 <p:sld xmlns:a="http://schemas.openxmlformats.org/drawingml/2006/main" xmlns:r="http://schemas.openxmlformats.org/officeDocument/2006/relationships" xmlns:p="http://schemas.openxmlformats.org/presentationml/2006/main">
   <p:cSld>
     <p:spTree>
@@ -4188,7 +4700,7 @@
 </p:sld>
 </file>
 
-<file path=ppt/slides/slide6.xml><?xml version="1.0" encoding="utf-8"?>
+<file path=ppt/slides/slide7.xml><?xml version="1.0" encoding="utf-8"?>
 <p:sld xmlns:a="http://schemas.openxmlformats.org/drawingml/2006/main" xmlns:r="http://schemas.openxmlformats.org/officeDocument/2006/relationships" xmlns:p="http://schemas.openxmlformats.org/presentationml/2006/main">
   <p:cSld>
     <p:spTree>
@@ -4276,7 +4788,7 @@
 </p:sld>
 </file>
 
-<file path=ppt/slides/slide7.xml><?xml version="1.0" encoding="utf-8"?>
+<file path=ppt/slides/slide8.xml><?xml version="1.0" encoding="utf-8"?>
 <p:sld xmlns:a="http://schemas.openxmlformats.org/drawingml/2006/main" xmlns:r="http://schemas.openxmlformats.org/officeDocument/2006/relationships" xmlns:p="http://schemas.openxmlformats.org/presentationml/2006/main">
   <p:cSld>
     <p:spTree>
@@ -4371,7 +4883,7 @@
 </p:sld>
 </file>
 
-<file path=ppt/slides/slide8.xml><?xml version="1.0" encoding="utf-8"?>
+<file path=ppt/slides/slide9.xml><?xml version="1.0" encoding="utf-8"?>
 <p:sld xmlns:a="http://schemas.openxmlformats.org/drawingml/2006/main" xmlns:r="http://schemas.openxmlformats.org/officeDocument/2006/relationships" xmlns:p="http://schemas.openxmlformats.org/presentationml/2006/main">
   <p:cSld>
     <p:spTree>
@@ -4457,101 +4969,6 @@
     <p:extLst>
       <p:ext uri="{BB962C8B-B14F-4D97-AF65-F5344CB8AC3E}">
         <p14:creationId xmlns:p14="http://schemas.microsoft.com/office/powerpoint/2010/main" val="3462628701"/>
-      </p:ext>
-    </p:extLst>
-  </p:cSld>
-  <p:clrMapOvr>
-    <a:masterClrMapping/>
-  </p:clrMapOvr>
-</p:sld>
-</file>
-
-<file path=ppt/slides/slide9.xml><?xml version="1.0" encoding="utf-8"?>
-<p:sld xmlns:a="http://schemas.openxmlformats.org/drawingml/2006/main" xmlns:r="http://schemas.openxmlformats.org/officeDocument/2006/relationships" xmlns:p="http://schemas.openxmlformats.org/presentationml/2006/main">
-  <p:cSld>
-    <p:spTree>
-      <p:nvGrpSpPr>
-        <p:cNvPr id="1" name=""/>
-        <p:cNvGrpSpPr/>
-        <p:nvPr/>
-      </p:nvGrpSpPr>
-      <p:grpSpPr>
-        <a:xfrm>
-          <a:off x="0" y="0"/>
-          <a:ext cx="0" cy="0"/>
-          <a:chOff x="0" y="0"/>
-          <a:chExt cx="0" cy="0"/>
-        </a:xfrm>
-      </p:grpSpPr>
-      <p:sp>
-        <p:nvSpPr>
-          <p:cNvPr id="2" name="Title 1">
-            <a:extLst>
-              <a:ext uri="{FF2B5EF4-FFF2-40B4-BE49-F238E27FC236}">
-                <a16:creationId xmlns:a16="http://schemas.microsoft.com/office/drawing/2014/main" id="{EA31846E-32CF-6F92-4CA8-A60E6542FC0E}"/>
-              </a:ext>
-            </a:extLst>
-          </p:cNvPr>
-          <p:cNvSpPr>
-            <a:spLocks noGrp="1"/>
-          </p:cNvSpPr>
-          <p:nvPr>
-            <p:ph type="title"/>
-          </p:nvPr>
-        </p:nvSpPr>
-        <p:spPr>
-          <a:xfrm>
-            <a:off x="609600" y="101018"/>
-            <a:ext cx="10972800" cy="385119"/>
-          </a:xfrm>
-        </p:spPr>
-        <p:txBody>
-          <a:bodyPr>
-            <a:normAutofit fontScale="90000"/>
-          </a:bodyPr>
-          <a:lstStyle/>
-          <a:p>
-            <a:r>
-              <a:rPr lang="en-US" dirty="0"/>
-              <a:t>Agent Specialization Diagram</a:t>
-            </a:r>
-          </a:p>
-        </p:txBody>
-      </p:sp>
-      <p:pic>
-        <p:nvPicPr>
-          <p:cNvPr id="4" name="Picture 3">
-            <a:extLst>
-              <a:ext uri="{FF2B5EF4-FFF2-40B4-BE49-F238E27FC236}">
-                <a16:creationId xmlns:a16="http://schemas.microsoft.com/office/drawing/2014/main" id="{CC2F3298-17DB-FA48-C8A3-C5FDB9B56554}"/>
-              </a:ext>
-            </a:extLst>
-          </p:cNvPr>
-          <p:cNvPicPr>
-            <a:picLocks noChangeAspect="1"/>
-          </p:cNvPicPr>
-          <p:nvPr/>
-        </p:nvPicPr>
-        <p:blipFill>
-          <a:blip r:embed="rId2"/>
-          <a:stretch>
-            <a:fillRect/>
-          </a:stretch>
-        </p:blipFill>
-        <p:spPr>
-          <a:xfrm>
-            <a:off x="42742" y="2050862"/>
-            <a:ext cx="12106516" cy="2756276"/>
-          </a:xfrm>
-          <a:prstGeom prst="rect">
-            <a:avLst/>
-          </a:prstGeom>
-        </p:spPr>
-      </p:pic>
-    </p:spTree>
-    <p:extLst>
-      <p:ext uri="{BB962C8B-B14F-4D97-AF65-F5344CB8AC3E}">
-        <p14:creationId xmlns:p14="http://schemas.microsoft.com/office/powerpoint/2010/main" val="2522311710"/>
       </p:ext>
     </p:extLst>
   </p:cSld>

--- a/ccg-presentation/CCG_Readout.pptx
+++ b/ccg-presentation/CCG_Readout.pptx
@@ -5,21 +5,20 @@
     <p:sldMasterId id="2147483648" r:id="rId1"/>
   </p:sldMasterIdLst>
   <p:notesMasterIdLst>
-    <p:notesMasterId r:id="rId14"/>
+    <p:notesMasterId r:id="rId13"/>
   </p:notesMasterIdLst>
   <p:sldIdLst>
     <p:sldId id="256" r:id="rId2"/>
-    <p:sldId id="270" r:id="rId3"/>
-    <p:sldId id="262" r:id="rId4"/>
-    <p:sldId id="260" r:id="rId5"/>
-    <p:sldId id="261" r:id="rId6"/>
-    <p:sldId id="263" r:id="rId7"/>
-    <p:sldId id="264" r:id="rId8"/>
-    <p:sldId id="265" r:id="rId9"/>
-    <p:sldId id="266" r:id="rId10"/>
-    <p:sldId id="269" r:id="rId11"/>
-    <p:sldId id="267" r:id="rId12"/>
-    <p:sldId id="268" r:id="rId13"/>
+    <p:sldId id="262" r:id="rId3"/>
+    <p:sldId id="260" r:id="rId4"/>
+    <p:sldId id="261" r:id="rId5"/>
+    <p:sldId id="263" r:id="rId6"/>
+    <p:sldId id="264" r:id="rId7"/>
+    <p:sldId id="265" r:id="rId8"/>
+    <p:sldId id="266" r:id="rId9"/>
+    <p:sldId id="269" r:id="rId10"/>
+    <p:sldId id="267" r:id="rId11"/>
+    <p:sldId id="268" r:id="rId12"/>
   </p:sldIdLst>
   <p:sldSz cx="12192000" cy="6858000"/>
   <p:notesSz cx="6858000" cy="9144000"/>
@@ -124,7 +123,6 @@
         <p14:section name="Default Section" id="{AF26F20B-C463-0349-B3F4-28E85F07C8D9}">
           <p14:sldIdLst>
             <p14:sldId id="256"/>
-            <p14:sldId id="270"/>
           </p14:sldIdLst>
         </p14:section>
         <p14:section name="SINGLE AGENT SOLUTION" id="{4D64E129-12EB-1547-992A-4FFB90BB2CA9}">
@@ -251,7 +249,7 @@
           <a:p>
             <a:fld id="{FAB0EADF-4EBE-F34E-AAFC-2786A2E235DE}" type="datetimeFigureOut">
               <a:rPr lang="en-US" smtClean="0"/>
-              <a:t>11/1/25</a:t>
+              <a:t>11/2/25</a:t>
             </a:fld>
             <a:endParaRPr lang="en-US"/>
           </a:p>
@@ -583,7 +581,7 @@
           <a:p>
             <a:fld id="{D4053980-04C6-514C-B838-6C1CBA4B85FD}" type="slidenum">
               <a:rPr lang="en-US" smtClean="0"/>
-              <a:t>9</a:t>
+              <a:t>8</a:t>
             </a:fld>
             <a:endParaRPr lang="en-US"/>
           </a:p>
@@ -781,7 +779,7 @@
           <a:p>
             <a:fld id="{5BCAD085-E8A6-8845-BD4E-CB4CCA059FC4}" type="datetimeFigureOut">
               <a:rPr lang="en-US" smtClean="0"/>
-              <a:t>11/1/25</a:t>
+              <a:t>11/2/25</a:t>
             </a:fld>
             <a:endParaRPr lang="en-US"/>
           </a:p>
@@ -949,7 +947,7 @@
           <a:p>
             <a:fld id="{5BCAD085-E8A6-8845-BD4E-CB4CCA059FC4}" type="datetimeFigureOut">
               <a:rPr lang="en-US" smtClean="0"/>
-              <a:t>11/1/25</a:t>
+              <a:t>11/2/25</a:t>
             </a:fld>
             <a:endParaRPr lang="en-US"/>
           </a:p>
@@ -1127,7 +1125,7 @@
           <a:p>
             <a:fld id="{5BCAD085-E8A6-8845-BD4E-CB4CCA059FC4}" type="datetimeFigureOut">
               <a:rPr lang="en-US" smtClean="0"/>
-              <a:t>11/1/25</a:t>
+              <a:t>11/2/25</a:t>
             </a:fld>
             <a:endParaRPr lang="en-US"/>
           </a:p>
@@ -1295,7 +1293,7 @@
           <a:p>
             <a:fld id="{5BCAD085-E8A6-8845-BD4E-CB4CCA059FC4}" type="datetimeFigureOut">
               <a:rPr lang="en-US" smtClean="0"/>
-              <a:t>11/1/25</a:t>
+              <a:t>11/2/25</a:t>
             </a:fld>
             <a:endParaRPr lang="en-US"/>
           </a:p>
@@ -1540,7 +1538,7 @@
           <a:p>
             <a:fld id="{5BCAD085-E8A6-8845-BD4E-CB4CCA059FC4}" type="datetimeFigureOut">
               <a:rPr lang="en-US" smtClean="0"/>
-              <a:t>11/1/25</a:t>
+              <a:t>11/2/25</a:t>
             </a:fld>
             <a:endParaRPr lang="en-US"/>
           </a:p>
@@ -1825,7 +1823,7 @@
           <a:p>
             <a:fld id="{5BCAD085-E8A6-8845-BD4E-CB4CCA059FC4}" type="datetimeFigureOut">
               <a:rPr lang="en-US" smtClean="0"/>
-              <a:t>11/1/25</a:t>
+              <a:t>11/2/25</a:t>
             </a:fld>
             <a:endParaRPr lang="en-US"/>
           </a:p>
@@ -2244,7 +2242,7 @@
           <a:p>
             <a:fld id="{5BCAD085-E8A6-8845-BD4E-CB4CCA059FC4}" type="datetimeFigureOut">
               <a:rPr lang="en-US" smtClean="0"/>
-              <a:t>11/1/25</a:t>
+              <a:t>11/2/25</a:t>
             </a:fld>
             <a:endParaRPr lang="en-US"/>
           </a:p>
@@ -2361,7 +2359,7 @@
           <a:p>
             <a:fld id="{5BCAD085-E8A6-8845-BD4E-CB4CCA059FC4}" type="datetimeFigureOut">
               <a:rPr lang="en-US" smtClean="0"/>
-              <a:t>11/1/25</a:t>
+              <a:t>11/2/25</a:t>
             </a:fld>
             <a:endParaRPr lang="en-US"/>
           </a:p>
@@ -2456,7 +2454,7 @@
           <a:p>
             <a:fld id="{5BCAD085-E8A6-8845-BD4E-CB4CCA059FC4}" type="datetimeFigureOut">
               <a:rPr lang="en-US" smtClean="0"/>
-              <a:t>11/1/25</a:t>
+              <a:t>11/2/25</a:t>
             </a:fld>
             <a:endParaRPr lang="en-US"/>
           </a:p>
@@ -2731,7 +2729,7 @@
           <a:p>
             <a:fld id="{5BCAD085-E8A6-8845-BD4E-CB4CCA059FC4}" type="datetimeFigureOut">
               <a:rPr lang="en-US" smtClean="0"/>
-              <a:t>11/1/25</a:t>
+              <a:t>11/2/25</a:t>
             </a:fld>
             <a:endParaRPr lang="en-US"/>
           </a:p>
@@ -2983,7 +2981,7 @@
           <a:p>
             <a:fld id="{5BCAD085-E8A6-8845-BD4E-CB4CCA059FC4}" type="datetimeFigureOut">
               <a:rPr lang="en-US" smtClean="0"/>
-              <a:t>11/1/25</a:t>
+              <a:t>11/2/25</a:t>
             </a:fld>
             <a:endParaRPr lang="en-US"/>
           </a:p>
@@ -3194,7 +3192,7 @@
           <a:p>
             <a:fld id="{5BCAD085-E8A6-8845-BD4E-CB4CCA059FC4}" type="datetimeFigureOut">
               <a:rPr lang="en-US" smtClean="0"/>
-              <a:t>11/1/25</a:t>
+              <a:t>11/2/25</a:t>
             </a:fld>
             <a:endParaRPr lang="en-US"/>
           </a:p>
@@ -3649,101 +3647,6 @@
           <p:cNvPr id="2" name="Title 1">
             <a:extLst>
               <a:ext uri="{FF2B5EF4-FFF2-40B4-BE49-F238E27FC236}">
-                <a16:creationId xmlns:a16="http://schemas.microsoft.com/office/drawing/2014/main" id="{EA31846E-32CF-6F92-4CA8-A60E6542FC0E}"/>
-              </a:ext>
-            </a:extLst>
-          </p:cNvPr>
-          <p:cNvSpPr>
-            <a:spLocks noGrp="1"/>
-          </p:cNvSpPr>
-          <p:nvPr>
-            <p:ph type="title"/>
-          </p:nvPr>
-        </p:nvSpPr>
-        <p:spPr>
-          <a:xfrm>
-            <a:off x="609600" y="101018"/>
-            <a:ext cx="10972800" cy="385119"/>
-          </a:xfrm>
-        </p:spPr>
-        <p:txBody>
-          <a:bodyPr>
-            <a:normAutofit fontScale="90000"/>
-          </a:bodyPr>
-          <a:lstStyle/>
-          <a:p>
-            <a:r>
-              <a:rPr lang="en-US" dirty="0"/>
-              <a:t>Agent Specialization Diagram</a:t>
-            </a:r>
-          </a:p>
-        </p:txBody>
-      </p:sp>
-      <p:pic>
-        <p:nvPicPr>
-          <p:cNvPr id="4" name="Picture 3">
-            <a:extLst>
-              <a:ext uri="{FF2B5EF4-FFF2-40B4-BE49-F238E27FC236}">
-                <a16:creationId xmlns:a16="http://schemas.microsoft.com/office/drawing/2014/main" id="{CC2F3298-17DB-FA48-C8A3-C5FDB9B56554}"/>
-              </a:ext>
-            </a:extLst>
-          </p:cNvPr>
-          <p:cNvPicPr>
-            <a:picLocks noChangeAspect="1"/>
-          </p:cNvPicPr>
-          <p:nvPr/>
-        </p:nvPicPr>
-        <p:blipFill>
-          <a:blip r:embed="rId2"/>
-          <a:stretch>
-            <a:fillRect/>
-          </a:stretch>
-        </p:blipFill>
-        <p:spPr>
-          <a:xfrm>
-            <a:off x="42742" y="2050862"/>
-            <a:ext cx="12106516" cy="2756276"/>
-          </a:xfrm>
-          <a:prstGeom prst="rect">
-            <a:avLst/>
-          </a:prstGeom>
-        </p:spPr>
-      </p:pic>
-    </p:spTree>
-    <p:extLst>
-      <p:ext uri="{BB962C8B-B14F-4D97-AF65-F5344CB8AC3E}">
-        <p14:creationId xmlns:p14="http://schemas.microsoft.com/office/powerpoint/2010/main" val="2522311710"/>
-      </p:ext>
-    </p:extLst>
-  </p:cSld>
-  <p:clrMapOvr>
-    <a:masterClrMapping/>
-  </p:clrMapOvr>
-</p:sld>
-</file>
-
-<file path=ppt/slides/slide11.xml><?xml version="1.0" encoding="utf-8"?>
-<p:sld xmlns:a="http://schemas.openxmlformats.org/drawingml/2006/main" xmlns:r="http://schemas.openxmlformats.org/officeDocument/2006/relationships" xmlns:p="http://schemas.openxmlformats.org/presentationml/2006/main">
-  <p:cSld>
-    <p:spTree>
-      <p:nvGrpSpPr>
-        <p:cNvPr id="1" name=""/>
-        <p:cNvGrpSpPr/>
-        <p:nvPr/>
-      </p:nvGrpSpPr>
-      <p:grpSpPr>
-        <a:xfrm>
-          <a:off x="0" y="0"/>
-          <a:ext cx="0" cy="0"/>
-          <a:chOff x="0" y="0"/>
-          <a:chExt cx="0" cy="0"/>
-        </a:xfrm>
-      </p:grpSpPr>
-      <p:sp>
-        <p:nvSpPr>
-          <p:cNvPr id="2" name="Title 1">
-            <a:extLst>
-              <a:ext uri="{FF2B5EF4-FFF2-40B4-BE49-F238E27FC236}">
                 <a16:creationId xmlns:a16="http://schemas.microsoft.com/office/drawing/2014/main" id="{4D0B4AC9-95E2-55A1-57A2-BB222AAB79ED}"/>
               </a:ext>
             </a:extLst>
@@ -3817,7 +3720,7 @@
 </p:sld>
 </file>
 
-<file path=ppt/slides/slide12.xml><?xml version="1.0" encoding="utf-8"?>
+<file path=ppt/slides/slide11.xml><?xml version="1.0" encoding="utf-8"?>
 <p:sld xmlns:a="http://schemas.openxmlformats.org/drawingml/2006/main" xmlns:r="http://schemas.openxmlformats.org/officeDocument/2006/relationships" xmlns:p="http://schemas.openxmlformats.org/presentationml/2006/main">
   <p:cSld>
     <p:spTree>
@@ -3934,421 +3837,6 @@
           <p:cNvPr id="2" name="Title 1">
             <a:extLst>
               <a:ext uri="{FF2B5EF4-FFF2-40B4-BE49-F238E27FC236}">
-                <a16:creationId xmlns:a16="http://schemas.microsoft.com/office/drawing/2014/main" id="{59762BD4-A24D-7C5A-14F3-CAEDEF326C6B}"/>
-              </a:ext>
-            </a:extLst>
-          </p:cNvPr>
-          <p:cNvSpPr>
-            <a:spLocks noGrp="1"/>
-          </p:cNvSpPr>
-          <p:nvPr>
-            <p:ph type="title"/>
-          </p:nvPr>
-        </p:nvSpPr>
-        <p:spPr>
-          <a:xfrm>
-            <a:off x="609600" y="274638"/>
-            <a:ext cx="10972800" cy="372634"/>
-          </a:xfrm>
-        </p:spPr>
-        <p:txBody>
-          <a:bodyPr>
-            <a:normAutofit fontScale="90000"/>
-          </a:bodyPr>
-          <a:lstStyle/>
-          <a:p>
-            <a:r>
-              <a:rPr lang="en-CA" dirty="0">
-                <a:latin typeface="Segoe UI" panose="020B0502040204020203" pitchFamily="34" charset="0"/>
-                <a:cs typeface="Segoe UI" panose="020B0502040204020203" pitchFamily="34" charset="0"/>
-              </a:rPr>
-              <a:t>Contoso Consulting Group — Multi-Agent Timesheet Assistant</a:t>
-            </a:r>
-            <a:endParaRPr lang="en-US" dirty="0"/>
-          </a:p>
-        </p:txBody>
-      </p:sp>
-      <p:sp>
-        <p:nvSpPr>
-          <p:cNvPr id="3" name="Content Placeholder 2">
-            <a:extLst>
-              <a:ext uri="{FF2B5EF4-FFF2-40B4-BE49-F238E27FC236}">
-                <a16:creationId xmlns:a16="http://schemas.microsoft.com/office/drawing/2014/main" id="{55ECBA5B-299F-0691-A77B-44DEFCE5AD94}"/>
-              </a:ext>
-            </a:extLst>
-          </p:cNvPr>
-          <p:cNvSpPr>
-            <a:spLocks noGrp="1"/>
-          </p:cNvSpPr>
-          <p:nvPr>
-            <p:ph idx="1"/>
-          </p:nvPr>
-        </p:nvSpPr>
-        <p:spPr/>
-        <p:txBody>
-          <a:bodyPr>
-            <a:normAutofit fontScale="25000" lnSpcReduction="20000"/>
-          </a:bodyPr>
-          <a:lstStyle/>
-          <a:p>
-            <a:pPr marL="0" indent="0">
-              <a:buNone/>
-            </a:pPr>
-            <a:br>
-              <a:rPr lang="en-CA" sz="5600" dirty="0">
-                <a:latin typeface="Segoe UI" panose="020B0502040204020203" pitchFamily="34" charset="0"/>
-                <a:cs typeface="Segoe UI" panose="020B0502040204020203" pitchFamily="34" charset="0"/>
-              </a:rPr>
-            </a:br>
-            <a:endParaRPr lang="en-CA" sz="5600" dirty="0">
-              <a:latin typeface="Segoe UI" panose="020B0502040204020203" pitchFamily="34" charset="0"/>
-              <a:cs typeface="Segoe UI" panose="020B0502040204020203" pitchFamily="34" charset="0"/>
-            </a:endParaRPr>
-          </a:p>
-          <a:p>
-            <a:pPr marL="0" indent="0">
-              <a:buNone/>
-            </a:pPr>
-            <a:r>
-              <a:rPr lang="en-CA" sz="5600" b="1" dirty="0">
-                <a:latin typeface="Segoe UI" panose="020B0502040204020203" pitchFamily="34" charset="0"/>
-                <a:cs typeface="Segoe UI" panose="020B0502040204020203" pitchFamily="34" charset="0"/>
-              </a:rPr>
-              <a:t>### 🎯 The Problem</a:t>
-            </a:r>
-            <a:endParaRPr lang="en-CA" sz="5600" dirty="0">
-              <a:latin typeface="Segoe UI" panose="020B0502040204020203" pitchFamily="34" charset="0"/>
-              <a:cs typeface="Segoe UI" panose="020B0502040204020203" pitchFamily="34" charset="0"/>
-            </a:endParaRPr>
-          </a:p>
-          <a:p>
-            <a:pPr marL="0" indent="0">
-              <a:buNone/>
-            </a:pPr>
-            <a:br>
-              <a:rPr lang="en-CA" sz="5600" dirty="0">
-                <a:latin typeface="Segoe UI" panose="020B0502040204020203" pitchFamily="34" charset="0"/>
-                <a:cs typeface="Segoe UI" panose="020B0502040204020203" pitchFamily="34" charset="0"/>
-              </a:rPr>
-            </a:br>
-            <a:endParaRPr lang="en-CA" sz="5600" dirty="0">
-              <a:latin typeface="Segoe UI" panose="020B0502040204020203" pitchFamily="34" charset="0"/>
-              <a:cs typeface="Segoe UI" panose="020B0502040204020203" pitchFamily="34" charset="0"/>
-            </a:endParaRPr>
-          </a:p>
-          <a:p>
-            <a:pPr marL="0" indent="0">
-              <a:buNone/>
-            </a:pPr>
-            <a:r>
-              <a:rPr lang="en-CA" sz="5600" b="1" dirty="0">
-                <a:latin typeface="Segoe UI" panose="020B0502040204020203" pitchFamily="34" charset="0"/>
-                <a:cs typeface="Segoe UI" panose="020B0502040204020203" pitchFamily="34" charset="0"/>
-              </a:rPr>
-              <a:t>**Lost Revenue**</a:t>
-            </a:r>
-            <a:r>
-              <a:rPr lang="en-CA" sz="5600" dirty="0">
-                <a:latin typeface="Segoe UI" panose="020B0502040204020203" pitchFamily="34" charset="0"/>
-                <a:cs typeface="Segoe UI" panose="020B0502040204020203" pitchFamily="34" charset="0"/>
-              </a:rPr>
-              <a:t>:</a:t>
-            </a:r>
-          </a:p>
-          <a:p>
-            <a:pPr marL="0" indent="0">
-              <a:buNone/>
-            </a:pPr>
-            <a:r>
-              <a:rPr lang="en-CA" sz="5600" dirty="0">
-                <a:latin typeface="Segoe UI" panose="020B0502040204020203" pitchFamily="34" charset="0"/>
-                <a:cs typeface="Segoe UI" panose="020B0502040204020203" pitchFamily="34" charset="0"/>
-              </a:rPr>
-              <a:t>- 💸 Consultants lose </a:t>
-            </a:r>
-            <a:r>
-              <a:rPr lang="en-CA" sz="5600" b="1" dirty="0">
-                <a:latin typeface="Segoe UI" panose="020B0502040204020203" pitchFamily="34" charset="0"/>
-                <a:cs typeface="Segoe UI" panose="020B0502040204020203" pitchFamily="34" charset="0"/>
-              </a:rPr>
-              <a:t>**10-15% of billable time**</a:t>
-            </a:r>
-            <a:r>
-              <a:rPr lang="en-CA" sz="5600" dirty="0">
-                <a:latin typeface="Segoe UI" panose="020B0502040204020203" pitchFamily="34" charset="0"/>
-                <a:cs typeface="Segoe UI" panose="020B0502040204020203" pitchFamily="34" charset="0"/>
-              </a:rPr>
-              <a:t> annually</a:t>
-            </a:r>
-          </a:p>
-          <a:p>
-            <a:pPr marL="0" indent="0">
-              <a:buNone/>
-            </a:pPr>
-            <a:r>
-              <a:rPr lang="en-CA" sz="5600" dirty="0">
-                <a:latin typeface="Segoe UI" panose="020B0502040204020203" pitchFamily="34" charset="0"/>
-                <a:cs typeface="Segoe UI" panose="020B0502040204020203" pitchFamily="34" charset="0"/>
-              </a:rPr>
-              <a:t>- ✈️ Travel time </a:t>
-            </a:r>
-            <a:r>
-              <a:rPr lang="en-CA" sz="5600" b="1" dirty="0">
-                <a:latin typeface="Segoe UI" panose="020B0502040204020203" pitchFamily="34" charset="0"/>
-                <a:cs typeface="Segoe UI" panose="020B0502040204020203" pitchFamily="34" charset="0"/>
-              </a:rPr>
-              <a:t>**most commonly missed**</a:t>
-            </a:r>
-            <a:r>
-              <a:rPr lang="en-CA" sz="5600" dirty="0">
-                <a:latin typeface="Segoe UI" panose="020B0502040204020203" pitchFamily="34" charset="0"/>
-                <a:cs typeface="Segoe UI" panose="020B0502040204020203" pitchFamily="34" charset="0"/>
-              </a:rPr>
-              <a:t> (flights, drives, working meals)</a:t>
-            </a:r>
-          </a:p>
-          <a:p>
-            <a:pPr marL="0" indent="0">
-              <a:buNone/>
-            </a:pPr>
-            <a:r>
-              <a:rPr lang="en-CA" sz="5600" dirty="0">
-                <a:latin typeface="Segoe UI" panose="020B0502040204020203" pitchFamily="34" charset="0"/>
-                <a:cs typeface="Segoe UI" panose="020B0502040204020203" pitchFamily="34" charset="0"/>
-              </a:rPr>
-              <a:t>- 📅 Client meetings </a:t>
-            </a:r>
-            <a:r>
-              <a:rPr lang="en-CA" sz="5600" b="1" dirty="0">
-                <a:latin typeface="Segoe UI" panose="020B0502040204020203" pitchFamily="34" charset="0"/>
-                <a:cs typeface="Segoe UI" panose="020B0502040204020203" pitchFamily="34" charset="0"/>
-              </a:rPr>
-              <a:t>**forgotten**</a:t>
-            </a:r>
-            <a:r>
-              <a:rPr lang="en-CA" sz="5600" dirty="0">
-                <a:latin typeface="Segoe UI" panose="020B0502040204020203" pitchFamily="34" charset="0"/>
-                <a:cs typeface="Segoe UI" panose="020B0502040204020203" pitchFamily="34" charset="0"/>
-              </a:rPr>
-              <a:t> in timesheet records</a:t>
-            </a:r>
-          </a:p>
-          <a:p>
-            <a:pPr marL="0" indent="0">
-              <a:buNone/>
-            </a:pPr>
-            <a:r>
-              <a:rPr lang="en-CA" sz="5600" dirty="0">
-                <a:latin typeface="Segoe UI" panose="020B0502040204020203" pitchFamily="34" charset="0"/>
-                <a:cs typeface="Segoe UI" panose="020B0502040204020203" pitchFamily="34" charset="0"/>
-              </a:rPr>
-              <a:t>- 🔄 Manual reconciliation </a:t>
-            </a:r>
-            <a:r>
-              <a:rPr lang="en-CA" sz="5600" b="1" dirty="0">
-                <a:latin typeface="Segoe UI" panose="020B0502040204020203" pitchFamily="34" charset="0"/>
-                <a:cs typeface="Segoe UI" panose="020B0502040204020203" pitchFamily="34" charset="0"/>
-              </a:rPr>
-              <a:t>**wastes 15-20 minutes/week**</a:t>
-            </a:r>
-            <a:endParaRPr lang="en-CA" sz="5600" dirty="0">
-              <a:latin typeface="Segoe UI" panose="020B0502040204020203" pitchFamily="34" charset="0"/>
-              <a:cs typeface="Segoe UI" panose="020B0502040204020203" pitchFamily="34" charset="0"/>
-            </a:endParaRPr>
-          </a:p>
-          <a:p>
-            <a:pPr marL="0" indent="0">
-              <a:buNone/>
-            </a:pPr>
-            <a:br>
-              <a:rPr lang="en-CA" sz="5600" dirty="0">
-                <a:latin typeface="Segoe UI" panose="020B0502040204020203" pitchFamily="34" charset="0"/>
-                <a:cs typeface="Segoe UI" panose="020B0502040204020203" pitchFamily="34" charset="0"/>
-              </a:rPr>
-            </a:br>
-            <a:endParaRPr lang="en-CA" sz="5600" dirty="0">
-              <a:latin typeface="Segoe UI" panose="020B0502040204020203" pitchFamily="34" charset="0"/>
-              <a:cs typeface="Segoe UI" panose="020B0502040204020203" pitchFamily="34" charset="0"/>
-            </a:endParaRPr>
-          </a:p>
-          <a:p>
-            <a:pPr marL="0" indent="0">
-              <a:buNone/>
-            </a:pPr>
-            <a:r>
-              <a:rPr lang="en-CA" sz="5600" b="1" dirty="0">
-                <a:latin typeface="Segoe UI" panose="020B0502040204020203" pitchFamily="34" charset="0"/>
-                <a:cs typeface="Segoe UI" panose="020B0502040204020203" pitchFamily="34" charset="0"/>
-              </a:rPr>
-              <a:t>**Business Impact**</a:t>
-            </a:r>
-            <a:r>
-              <a:rPr lang="en-CA" sz="5600" dirty="0">
-                <a:latin typeface="Segoe UI" panose="020B0502040204020203" pitchFamily="34" charset="0"/>
-                <a:cs typeface="Segoe UI" panose="020B0502040204020203" pitchFamily="34" charset="0"/>
-              </a:rPr>
-              <a:t>:</a:t>
-            </a:r>
-          </a:p>
-          <a:p>
-            <a:pPr marL="0" indent="0">
-              <a:buNone/>
-            </a:pPr>
-            <a:r>
-              <a:rPr lang="en-CA" sz="5600" dirty="0">
-                <a:latin typeface="Segoe UI" panose="020B0502040204020203" pitchFamily="34" charset="0"/>
-                <a:cs typeface="Segoe UI" panose="020B0502040204020203" pitchFamily="34" charset="0"/>
-              </a:rPr>
-              <a:t>- 💰 </a:t>
-            </a:r>
-            <a:r>
-              <a:rPr lang="en-CA" sz="5600" b="1" dirty="0">
-                <a:latin typeface="Segoe UI" panose="020B0502040204020203" pitchFamily="34" charset="0"/>
-                <a:cs typeface="Segoe UI" panose="020B0502040204020203" pitchFamily="34" charset="0"/>
-              </a:rPr>
-              <a:t>**$1,000/week**</a:t>
-            </a:r>
-            <a:r>
-              <a:rPr lang="en-CA" sz="5600" dirty="0">
-                <a:latin typeface="Segoe UI" panose="020B0502040204020203" pitchFamily="34" charset="0"/>
-                <a:cs typeface="Segoe UI" panose="020B0502040204020203" pitchFamily="34" charset="0"/>
-              </a:rPr>
-              <a:t> lost revenue per consultant</a:t>
-            </a:r>
-          </a:p>
-          <a:p>
-            <a:pPr marL="0" indent="0">
-              <a:buNone/>
-            </a:pPr>
-            <a:r>
-              <a:rPr lang="en-CA" sz="5600" dirty="0">
-                <a:latin typeface="Segoe UI" panose="020B0502040204020203" pitchFamily="34" charset="0"/>
-                <a:cs typeface="Segoe UI" panose="020B0502040204020203" pitchFamily="34" charset="0"/>
-              </a:rPr>
-              <a:t>- ⏱️ </a:t>
-            </a:r>
-            <a:r>
-              <a:rPr lang="en-CA" sz="5600" b="1" dirty="0">
-                <a:latin typeface="Segoe UI" panose="020B0502040204020203" pitchFamily="34" charset="0"/>
-                <a:cs typeface="Segoe UI" panose="020B0502040204020203" pitchFamily="34" charset="0"/>
-              </a:rPr>
-              <a:t>**15-20 minutes/week**</a:t>
-            </a:r>
-            <a:r>
-              <a:rPr lang="en-CA" sz="5600" dirty="0">
-                <a:latin typeface="Segoe UI" panose="020B0502040204020203" pitchFamily="34" charset="0"/>
-                <a:cs typeface="Segoe UI" panose="020B0502040204020203" pitchFamily="34" charset="0"/>
-              </a:rPr>
-              <a:t> on manual reviews</a:t>
-            </a:r>
-          </a:p>
-          <a:p>
-            <a:pPr marL="0" indent="0">
-              <a:buNone/>
-            </a:pPr>
-            <a:r>
-              <a:rPr lang="en-CA" sz="5600" dirty="0">
-                <a:latin typeface="Segoe UI" panose="020B0502040204020203" pitchFamily="34" charset="0"/>
-                <a:cs typeface="Segoe UI" panose="020B0502040204020203" pitchFamily="34" charset="0"/>
-              </a:rPr>
-              <a:t>- ⚠️ </a:t>
-            </a:r>
-            <a:r>
-              <a:rPr lang="en-CA" sz="5600" b="1" dirty="0">
-                <a:latin typeface="Segoe UI" panose="020B0502040204020203" pitchFamily="34" charset="0"/>
-                <a:cs typeface="Segoe UI" panose="020B0502040204020203" pitchFamily="34" charset="0"/>
-              </a:rPr>
-              <a:t>**Compliance risks**</a:t>
-            </a:r>
-            <a:r>
-              <a:rPr lang="en-CA" sz="5600" dirty="0">
-                <a:latin typeface="Segoe UI" panose="020B0502040204020203" pitchFamily="34" charset="0"/>
-                <a:cs typeface="Segoe UI" panose="020B0502040204020203" pitchFamily="34" charset="0"/>
-              </a:rPr>
-              <a:t> from incomplete records</a:t>
-            </a:r>
-          </a:p>
-          <a:p>
-            <a:pPr marL="0" indent="0">
-              <a:buNone/>
-            </a:pPr>
-            <a:r>
-              <a:rPr lang="en-CA" sz="5600" dirty="0">
-                <a:latin typeface="Segoe UI" panose="020B0502040204020203" pitchFamily="34" charset="0"/>
-                <a:cs typeface="Segoe UI" panose="020B0502040204020203" pitchFamily="34" charset="0"/>
-              </a:rPr>
-              <a:t>- 📉 </a:t>
-            </a:r>
-            <a:r>
-              <a:rPr lang="en-CA" sz="5600" b="1" dirty="0">
-                <a:latin typeface="Segoe UI" panose="020B0502040204020203" pitchFamily="34" charset="0"/>
-                <a:cs typeface="Segoe UI" panose="020B0502040204020203" pitchFamily="34" charset="0"/>
-              </a:rPr>
-              <a:t>**Billing inconsistencies**</a:t>
-            </a:r>
-            <a:r>
-              <a:rPr lang="en-CA" sz="5600" dirty="0">
-                <a:latin typeface="Segoe UI" panose="020B0502040204020203" pitchFamily="34" charset="0"/>
-                <a:cs typeface="Segoe UI" panose="020B0502040204020203" pitchFamily="34" charset="0"/>
-              </a:rPr>
-              <a:t> damage client trust</a:t>
-            </a:r>
-          </a:p>
-          <a:p>
-            <a:pPr marL="0" indent="0">
-              <a:buNone/>
-            </a:pPr>
-            <a:br>
-              <a:rPr lang="en-CA" sz="5600" dirty="0">
-                <a:latin typeface="Segoe UI" panose="020B0502040204020203" pitchFamily="34" charset="0"/>
-                <a:cs typeface="Segoe UI" panose="020B0502040204020203" pitchFamily="34" charset="0"/>
-              </a:rPr>
-            </a:br>
-            <a:endParaRPr lang="en-CA" sz="5600" dirty="0">
-              <a:latin typeface="Segoe UI" panose="020B0502040204020203" pitchFamily="34" charset="0"/>
-              <a:cs typeface="Segoe UI" panose="020B0502040204020203" pitchFamily="34" charset="0"/>
-            </a:endParaRPr>
-          </a:p>
-          <a:p>
-            <a:endParaRPr lang="en-US" dirty="0"/>
-          </a:p>
-        </p:txBody>
-      </p:sp>
-    </p:spTree>
-    <p:extLst>
-      <p:ext uri="{BB962C8B-B14F-4D97-AF65-F5344CB8AC3E}">
-        <p14:creationId xmlns:p14="http://schemas.microsoft.com/office/powerpoint/2010/main" val="182270262"/>
-      </p:ext>
-    </p:extLst>
-  </p:cSld>
-  <p:clrMapOvr>
-    <a:masterClrMapping/>
-  </p:clrMapOvr>
-</p:sld>
-</file>
-
-<file path=ppt/slides/slide3.xml><?xml version="1.0" encoding="utf-8"?>
-<p:sld xmlns:a="http://schemas.openxmlformats.org/drawingml/2006/main" xmlns:r="http://schemas.openxmlformats.org/officeDocument/2006/relationships" xmlns:p="http://schemas.openxmlformats.org/presentationml/2006/main">
-  <p:cSld>
-    <p:spTree>
-      <p:nvGrpSpPr>
-        <p:cNvPr id="1" name=""/>
-        <p:cNvGrpSpPr/>
-        <p:nvPr/>
-      </p:nvGrpSpPr>
-      <p:grpSpPr>
-        <a:xfrm>
-          <a:off x="0" y="0"/>
-          <a:ext cx="0" cy="0"/>
-          <a:chOff x="0" y="0"/>
-          <a:chExt cx="0" cy="0"/>
-        </a:xfrm>
-      </p:grpSpPr>
-      <p:sp>
-        <p:nvSpPr>
-          <p:cNvPr id="2" name="Title 1">
-            <a:extLst>
-              <a:ext uri="{FF2B5EF4-FFF2-40B4-BE49-F238E27FC236}">
                 <a16:creationId xmlns:a16="http://schemas.microsoft.com/office/drawing/2014/main" id="{5EE2E313-8B26-579B-5772-A0A3AB552B7D}"/>
               </a:ext>
             </a:extLst>
@@ -4422,7 +3910,7 @@
 </p:sld>
 </file>
 
-<file path=ppt/slides/slide4.xml><?xml version="1.0" encoding="utf-8"?>
+<file path=ppt/slides/slide3.xml><?xml version="1.0" encoding="utf-8"?>
 <p:sld xmlns:a="http://schemas.openxmlformats.org/drawingml/2006/main" xmlns:r="http://schemas.openxmlformats.org/officeDocument/2006/relationships" xmlns:p="http://schemas.openxmlformats.org/presentationml/2006/main">
   <p:cSld>
     <p:spTree>
@@ -4510,7 +3998,7 @@
 </p:sld>
 </file>
 
-<file path=ppt/slides/slide5.xml><?xml version="1.0" encoding="utf-8"?>
+<file path=ppt/slides/slide4.xml><?xml version="1.0" encoding="utf-8"?>
 <p:sld xmlns:a="http://schemas.openxmlformats.org/drawingml/2006/main" xmlns:r="http://schemas.openxmlformats.org/officeDocument/2006/relationships" xmlns:p="http://schemas.openxmlformats.org/presentationml/2006/main">
   <p:cSld>
     <p:spTree>
@@ -4605,7 +4093,7 @@
 </p:sld>
 </file>
 
-<file path=ppt/slides/slide6.xml><?xml version="1.0" encoding="utf-8"?>
+<file path=ppt/slides/slide5.xml><?xml version="1.0" encoding="utf-8"?>
 <p:sld xmlns:a="http://schemas.openxmlformats.org/drawingml/2006/main" xmlns:r="http://schemas.openxmlformats.org/officeDocument/2006/relationships" xmlns:p="http://schemas.openxmlformats.org/presentationml/2006/main">
   <p:cSld>
     <p:spTree>
@@ -4700,7 +4188,7 @@
 </p:sld>
 </file>
 
-<file path=ppt/slides/slide7.xml><?xml version="1.0" encoding="utf-8"?>
+<file path=ppt/slides/slide6.xml><?xml version="1.0" encoding="utf-8"?>
 <p:sld xmlns:a="http://schemas.openxmlformats.org/drawingml/2006/main" xmlns:r="http://schemas.openxmlformats.org/officeDocument/2006/relationships" xmlns:p="http://schemas.openxmlformats.org/presentationml/2006/main">
   <p:cSld>
     <p:spTree>
@@ -4788,7 +4276,7 @@
 </p:sld>
 </file>
 
-<file path=ppt/slides/slide8.xml><?xml version="1.0" encoding="utf-8"?>
+<file path=ppt/slides/slide7.xml><?xml version="1.0" encoding="utf-8"?>
 <p:sld xmlns:a="http://schemas.openxmlformats.org/drawingml/2006/main" xmlns:r="http://schemas.openxmlformats.org/officeDocument/2006/relationships" xmlns:p="http://schemas.openxmlformats.org/presentationml/2006/main">
   <p:cSld>
     <p:spTree>
@@ -4883,7 +4371,7 @@
 </p:sld>
 </file>
 
-<file path=ppt/slides/slide9.xml><?xml version="1.0" encoding="utf-8"?>
+<file path=ppt/slides/slide8.xml><?xml version="1.0" encoding="utf-8"?>
 <p:sld xmlns:a="http://schemas.openxmlformats.org/drawingml/2006/main" xmlns:r="http://schemas.openxmlformats.org/officeDocument/2006/relationships" xmlns:p="http://schemas.openxmlformats.org/presentationml/2006/main">
   <p:cSld>
     <p:spTree>
@@ -4969,6 +4457,101 @@
     <p:extLst>
       <p:ext uri="{BB962C8B-B14F-4D97-AF65-F5344CB8AC3E}">
         <p14:creationId xmlns:p14="http://schemas.microsoft.com/office/powerpoint/2010/main" val="3462628701"/>
+      </p:ext>
+    </p:extLst>
+  </p:cSld>
+  <p:clrMapOvr>
+    <a:masterClrMapping/>
+  </p:clrMapOvr>
+</p:sld>
+</file>
+
+<file path=ppt/slides/slide9.xml><?xml version="1.0" encoding="utf-8"?>
+<p:sld xmlns:a="http://schemas.openxmlformats.org/drawingml/2006/main" xmlns:r="http://schemas.openxmlformats.org/officeDocument/2006/relationships" xmlns:p="http://schemas.openxmlformats.org/presentationml/2006/main">
+  <p:cSld>
+    <p:spTree>
+      <p:nvGrpSpPr>
+        <p:cNvPr id="1" name=""/>
+        <p:cNvGrpSpPr/>
+        <p:nvPr/>
+      </p:nvGrpSpPr>
+      <p:grpSpPr>
+        <a:xfrm>
+          <a:off x="0" y="0"/>
+          <a:ext cx="0" cy="0"/>
+          <a:chOff x="0" y="0"/>
+          <a:chExt cx="0" cy="0"/>
+        </a:xfrm>
+      </p:grpSpPr>
+      <p:sp>
+        <p:nvSpPr>
+          <p:cNvPr id="2" name="Title 1">
+            <a:extLst>
+              <a:ext uri="{FF2B5EF4-FFF2-40B4-BE49-F238E27FC236}">
+                <a16:creationId xmlns:a16="http://schemas.microsoft.com/office/drawing/2014/main" id="{EA31846E-32CF-6F92-4CA8-A60E6542FC0E}"/>
+              </a:ext>
+            </a:extLst>
+          </p:cNvPr>
+          <p:cNvSpPr>
+            <a:spLocks noGrp="1"/>
+          </p:cNvSpPr>
+          <p:nvPr>
+            <p:ph type="title"/>
+          </p:nvPr>
+        </p:nvSpPr>
+        <p:spPr>
+          <a:xfrm>
+            <a:off x="609600" y="101018"/>
+            <a:ext cx="10972800" cy="385119"/>
+          </a:xfrm>
+        </p:spPr>
+        <p:txBody>
+          <a:bodyPr>
+            <a:normAutofit fontScale="90000"/>
+          </a:bodyPr>
+          <a:lstStyle/>
+          <a:p>
+            <a:r>
+              <a:rPr lang="en-US" dirty="0"/>
+              <a:t>Agent Specialization Diagram</a:t>
+            </a:r>
+          </a:p>
+        </p:txBody>
+      </p:sp>
+      <p:pic>
+        <p:nvPicPr>
+          <p:cNvPr id="4" name="Picture 3">
+            <a:extLst>
+              <a:ext uri="{FF2B5EF4-FFF2-40B4-BE49-F238E27FC236}">
+                <a16:creationId xmlns:a16="http://schemas.microsoft.com/office/drawing/2014/main" id="{CC2F3298-17DB-FA48-C8A3-C5FDB9B56554}"/>
+              </a:ext>
+            </a:extLst>
+          </p:cNvPr>
+          <p:cNvPicPr>
+            <a:picLocks noChangeAspect="1"/>
+          </p:cNvPicPr>
+          <p:nvPr/>
+        </p:nvPicPr>
+        <p:blipFill>
+          <a:blip r:embed="rId2"/>
+          <a:stretch>
+            <a:fillRect/>
+          </a:stretch>
+        </p:blipFill>
+        <p:spPr>
+          <a:xfrm>
+            <a:off x="42742" y="2050862"/>
+            <a:ext cx="12106516" cy="2756276"/>
+          </a:xfrm>
+          <a:prstGeom prst="rect">
+            <a:avLst/>
+          </a:prstGeom>
+        </p:spPr>
+      </p:pic>
+    </p:spTree>
+    <p:extLst>
+      <p:ext uri="{BB962C8B-B14F-4D97-AF65-F5344CB8AC3E}">
+        <p14:creationId xmlns:p14="http://schemas.microsoft.com/office/powerpoint/2010/main" val="2522311710"/>
       </p:ext>
     </p:extLst>
   </p:cSld>
